--- a/prezentace/1. ročník/07 - bitmapova a vektorova grafika.pptx
+++ b/prezentace/1. ročník/07 - bitmapova a vektorova grafika.pptx
@@ -584,7 +584,7 @@
           <a:p>
             <a:fld id="{DD1C0AFD-19C8-4F60-A212-D1160A075A71}" type="datetimeFigureOut">
               <a:rPr lang="cs-CZ" smtClean="0"/>
-              <a:t>12.12.2025</a:t>
+              <a:t>11.12.2025</a:t>
             </a:fld>
             <a:endParaRPr lang="cs-CZ"/>
           </a:p>
@@ -895,11 +895,70 @@
           <a:bodyPr/>
           <a:lstStyle/>
           <a:p>
-            <a:endParaRPr lang="en-US" dirty="0">
-              <a:latin typeface="Calibri"/>
-              <a:ea typeface="Calibri"/>
-              <a:cs typeface="Calibri"/>
-            </a:endParaRPr>
+            <a:r>
+              <a:rPr lang="en-US" dirty="0" err="1">
+                <a:latin typeface="Calibri"/>
+                <a:ea typeface="Calibri"/>
+                <a:cs typeface="Calibri"/>
+              </a:rPr>
+              <a:t>Svět</a:t>
+            </a:r>
+            <a:r>
+              <a:rPr lang="en-US" dirty="0">
+                <a:latin typeface="Calibri"/>
+                <a:ea typeface="Calibri"/>
+                <a:cs typeface="Calibri"/>
+              </a:rPr>
+              <a:t> bez </a:t>
+            </a:r>
+            <a:r>
+              <a:rPr lang="en-US" dirty="0" err="1">
+                <a:latin typeface="Calibri"/>
+                <a:ea typeface="Calibri"/>
+                <a:cs typeface="Calibri"/>
+              </a:rPr>
+              <a:t>inernetu</a:t>
+            </a:r>
+            <a:r>
+              <a:rPr lang="en-US" dirty="0">
+                <a:latin typeface="Calibri"/>
+                <a:ea typeface="Calibri"/>
+                <a:cs typeface="Calibri"/>
+              </a:rPr>
+              <a:t>. </a:t>
+            </a:r>
+            <a:r>
+              <a:rPr lang="en-US" dirty="0" err="1">
+                <a:latin typeface="Calibri"/>
+                <a:ea typeface="Calibri"/>
+                <a:cs typeface="Calibri"/>
+              </a:rPr>
+              <a:t>Jaký</a:t>
+            </a:r>
+            <a:r>
+              <a:rPr lang="en-US" dirty="0">
+                <a:latin typeface="Calibri"/>
+                <a:ea typeface="Calibri"/>
+                <a:cs typeface="Calibri"/>
+              </a:rPr>
+              <a:t> by </a:t>
+            </a:r>
+            <a:r>
+              <a:rPr lang="en-US" dirty="0" err="1">
+                <a:latin typeface="Calibri"/>
+                <a:ea typeface="Calibri"/>
+                <a:cs typeface="Calibri"/>
+              </a:rPr>
+              <a:t>byl</a:t>
+            </a:r>
+            <a:r>
+              <a:rPr lang="en-US" dirty="0">
+                <a:latin typeface="Calibri"/>
+                <a:ea typeface="Calibri"/>
+                <a:cs typeface="Calibri"/>
+              </a:rPr>
+              <a:t>?</a:t>
+            </a:r>
           </a:p>
         </p:txBody>
       </p:sp>
@@ -1163,7 +1222,7 @@
           <a:p>
             <a:fld id="{4BDF68E2-58F2-4D09-BE8B-E3BD06533059}" type="datetimeFigureOut">
               <a:rPr lang="en-US" dirty="0"/>
-              <a:t>12/12/2025</a:t>
+              <a:t>12/11/2025</a:t>
             </a:fld>
             <a:endParaRPr lang="en-US" dirty="0"/>
           </a:p>
@@ -1369,7 +1428,7 @@
           <a:p>
             <a:fld id="{2E2D6473-DF6D-4702-B328-E0DD40540A4E}" type="datetimeFigureOut">
               <a:rPr lang="en-US" dirty="0"/>
-              <a:t>12/12/2025</a:t>
+              <a:t>12/11/2025</a:t>
             </a:fld>
             <a:endParaRPr lang="en-US" dirty="0"/>
           </a:p>
@@ -1623,7 +1682,7 @@
           <a:p>
             <a:fld id="{E26F7E3A-B166-407D-9866-32884E7D5B37}" type="datetimeFigureOut">
               <a:rPr lang="en-US" dirty="0"/>
-              <a:t>12/12/2025</a:t>
+              <a:t>12/11/2025</a:t>
             </a:fld>
             <a:endParaRPr lang="en-US" dirty="0"/>
           </a:p>
@@ -1795,7 +1854,7 @@
           <a:p>
             <a:fld id="{528FC5F6-F338-4AE4-BB23-26385BCFC423}" type="datetimeFigureOut">
               <a:rPr lang="en-US" dirty="0"/>
-              <a:t>12/12/2025</a:t>
+              <a:t>12/11/2025</a:t>
             </a:fld>
             <a:endParaRPr lang="en-US" dirty="0"/>
           </a:p>
@@ -2137,7 +2196,7 @@
           <a:p>
             <a:fld id="{20EBB0C4-6273-4C6E-B9BD-2EDC30F1CD52}" type="datetimeFigureOut">
               <a:rPr lang="en-US" dirty="0"/>
-              <a:t>12/12/2025</a:t>
+              <a:t>12/11/2025</a:t>
             </a:fld>
             <a:endParaRPr lang="en-US" dirty="0"/>
           </a:p>
@@ -2409,7 +2468,7 @@
           <a:p>
             <a:fld id="{19AB4D41-86C1-4908-B66A-0B50CEB3BF29}" type="datetimeFigureOut">
               <a:rPr lang="en-US" dirty="0"/>
-              <a:t>12/12/2025</a:t>
+              <a:t>12/11/2025</a:t>
             </a:fld>
             <a:endParaRPr lang="en-US" dirty="0"/>
           </a:p>
@@ -2785,7 +2844,7 @@
           <a:p>
             <a:fld id="{E6426E2C-56C1-4E0D-A793-0088A7FDD37E}" type="datetimeFigureOut">
               <a:rPr lang="en-US" dirty="0"/>
-              <a:t>12/12/2025</a:t>
+              <a:t>12/11/2025</a:t>
             </a:fld>
             <a:endParaRPr lang="en-US" dirty="0"/>
           </a:p>
@@ -2902,7 +2961,7 @@
           <a:p>
             <a:fld id="{C8C39B41-D8B5-4052-B551-9B5525EAA8B6}" type="datetimeFigureOut">
               <a:rPr lang="en-US" dirty="0"/>
-              <a:t>12/12/2025</a:t>
+              <a:t>12/11/2025</a:t>
             </a:fld>
             <a:endParaRPr lang="en-US" dirty="0"/>
           </a:p>
@@ -3073,7 +3132,7 @@
           <a:p>
             <a:fld id="{4D94136C-8742-45B2-AF27-D93DF72833A9}" type="datetimeFigureOut">
               <a:rPr lang="en-US" dirty="0"/>
-              <a:t>12/12/2025</a:t>
+              <a:t>12/11/2025</a:t>
             </a:fld>
             <a:endParaRPr lang="en-US" dirty="0"/>
           </a:p>
@@ -3426,7 +3485,7 @@
           <a:p>
             <a:fld id="{32ABBEA6-7C60-4B02-AE87-00D78D8422AF}" type="datetimeFigureOut">
               <a:rPr lang="en-US" dirty="0"/>
-              <a:t>12/12/2025</a:t>
+              <a:t>12/11/2025</a:t>
             </a:fld>
             <a:endParaRPr lang="en-US" dirty="0"/>
           </a:p>
@@ -3804,7 +3863,7 @@
           <a:p>
             <a:fld id="{C9CAD897-D46E-4AD2-BD9B-49DD3E640873}" type="datetimeFigureOut">
               <a:rPr lang="en-US" dirty="0"/>
-              <a:t>12/12/2025</a:t>
+              <a:t>12/11/2025</a:t>
             </a:fld>
             <a:endParaRPr lang="en-US" dirty="0"/>
           </a:p>
@@ -4089,7 +4148,7 @@
           <a:p>
             <a:fld id="{98624D31-43A5-475A-80CF-332C9F6DCF35}" type="datetimeFigureOut">
               <a:rPr lang="en-US" dirty="0"/>
-              <a:t>12/12/2025</a:t>
+              <a:t>12/11/2025</a:t>
             </a:fld>
             <a:endParaRPr lang="en-US" dirty="0"/>
           </a:p>
@@ -5001,7 +5060,7 @@
                 <a16:creationId xmlns:a16="http://schemas.microsoft.com/office/drawing/2014/main" id="{5CF81D86-BDBA-477C-B7DD-8D359BB9965B}"/>
               </a:ext>
               <a:ext uri="{C183D7F6-B498-43B3-948B-1728B52AA6E4}">
-                <adec:decorative xmlns:adec="http://schemas.microsoft.com/office/drawing/2017/decorative" xmlns="" val="1"/>
+                <adec:decorative xmlns:adec="http://schemas.microsoft.com/office/drawing/2017/decorative" val="1"/>
               </a:ext>
             </a:extLst>
           </p:cNvPr>
@@ -5131,7 +5190,7 @@
                 <a16:creationId xmlns:a16="http://schemas.microsoft.com/office/drawing/2014/main" id="{C65F3E9C-EF11-4F8F-A621-399C7A3E6401}"/>
               </a:ext>
               <a:ext uri="{C183D7F6-B498-43B3-948B-1728B52AA6E4}">
-                <adec:decorative xmlns:adec="http://schemas.microsoft.com/office/drawing/2017/decorative" xmlns="" val="1"/>
+                <adec:decorative xmlns:adec="http://schemas.microsoft.com/office/drawing/2017/decorative" val="1"/>
               </a:ext>
             </a:extLst>
           </p:cNvPr>
@@ -5332,7 +5391,7 @@
                 <a16:creationId xmlns:a16="http://schemas.microsoft.com/office/drawing/2014/main" id="{88AA064E-5F6E-4024-BC28-EDDC3DFC70E1}"/>
               </a:ext>
               <a:ext uri="{C183D7F6-B498-43B3-948B-1728B52AA6E4}">
-                <adec:decorative xmlns:adec="http://schemas.microsoft.com/office/drawing/2017/decorative" xmlns="" val="1"/>
+                <adec:decorative xmlns:adec="http://schemas.microsoft.com/office/drawing/2017/decorative" val="1"/>
               </a:ext>
             </a:extLst>
           </p:cNvPr>
@@ -5387,7 +5446,7 @@
                 <a16:creationId xmlns:a16="http://schemas.microsoft.com/office/drawing/2014/main" id="{03B29638-4838-4B9B-B9DB-96E542BAF3E6}"/>
               </a:ext>
               <a:ext uri="{C183D7F6-B498-43B3-948B-1728B52AA6E4}">
-                <adec:decorative xmlns:adec="http://schemas.microsoft.com/office/drawing/2017/decorative" xmlns="" val="1"/>
+                <adec:decorative xmlns:adec="http://schemas.microsoft.com/office/drawing/2017/decorative" val="1"/>
               </a:ext>
             </a:extLst>
           </p:cNvPr>
@@ -7202,9 +7261,30 @@
 </file>
 
 <file path=customXml/item1.xml><?xml version="1.0" encoding="utf-8"?>
-<ct:contentTypeSchema xmlns:ct="http://schemas.microsoft.com/office/2006/metadata/contentType" xmlns:ma="http://schemas.microsoft.com/office/2006/metadata/properties/metaAttributes" ct:_="" ma:_="" ma:contentTypeName="Dokument" ma:contentTypeID="0x01010052F7ECDF1E614946A5A39D5552BFC522" ma:contentTypeVersion="3" ma:contentTypeDescription="Vytvoří nový dokument" ma:contentTypeScope="" ma:versionID="0375011d691e61d91b9596942a8601dc">
-  <xsd:schema xmlns:xsd="http://www.w3.org/2001/XMLSchema" xmlns:xs="http://www.w3.org/2001/XMLSchema" xmlns:p="http://schemas.microsoft.com/office/2006/metadata/properties" xmlns:ns2="09a37b55-a4d7-45bd-a73f-33c2b1d41898" targetNamespace="http://schemas.microsoft.com/office/2006/metadata/properties" ma:root="true" ma:fieldsID="f6c9548d5894a94eccd88f005da6fd8a" ns2:_="">
+<p:properties xmlns:p="http://schemas.microsoft.com/office/2006/metadata/properties" xmlns:xsi="http://www.w3.org/2001/XMLSchema-instance" xmlns:pc="http://schemas.microsoft.com/office/infopath/2007/PartnerControls">
+  <documentManagement>
+    <TaxCatchAll xmlns="3eb61919-e7f8-4a11-8db4-9145fbd21da9" xsi:nil="true"/>
+    <lcf76f155ced4ddcb4097134ff3c332f xmlns="09a37b55-a4d7-45bd-a73f-33c2b1d41898">
+      <Terms xmlns="http://schemas.microsoft.com/office/infopath/2007/PartnerControls"/>
+    </lcf76f155ced4ddcb4097134ff3c332f>
+  </documentManagement>
+</p:properties>
+</file>
+
+<file path=customXml/item2.xml><?xml version="1.0" encoding="utf-8"?>
+<?mso-contentType ?>
+<FormTemplates xmlns="http://schemas.microsoft.com/sharepoint/v3/contenttype/forms">
+  <Display>DocumentLibraryForm</Display>
+  <Edit>DocumentLibraryForm</Edit>
+  <New>DocumentLibraryForm</New>
+</FormTemplates>
+</file>
+
+<file path=customXml/item3.xml><?xml version="1.0" encoding="utf-8"?>
+<ct:contentTypeSchema xmlns:ct="http://schemas.microsoft.com/office/2006/metadata/contentType" xmlns:ma="http://schemas.microsoft.com/office/2006/metadata/properties/metaAttributes" ct:_="" ma:_="" ma:contentTypeName="Dokument" ma:contentTypeID="0x01010052F7ECDF1E614946A5A39D5552BFC522" ma:contentTypeVersion="9" ma:contentTypeDescription="Vytvoří nový dokument" ma:contentTypeScope="" ma:versionID="cec7e99e499b1a399f5002d8f5cf0989">
+  <xsd:schema xmlns:xsd="http://www.w3.org/2001/XMLSchema" xmlns:xs="http://www.w3.org/2001/XMLSchema" xmlns:p="http://schemas.microsoft.com/office/2006/metadata/properties" xmlns:ns2="09a37b55-a4d7-45bd-a73f-33c2b1d41898" xmlns:ns3="3eb61919-e7f8-4a11-8db4-9145fbd21da9" targetNamespace="http://schemas.microsoft.com/office/2006/metadata/properties" ma:root="true" ma:fieldsID="7040e20160986dd2b45602a8e4e840ef" ns2:_="" ns3:_="">
     <xsd:import namespace="09a37b55-a4d7-45bd-a73f-33c2b1d41898"/>
+    <xsd:import namespace="3eb61919-e7f8-4a11-8db4-9145fbd21da9"/>
     <xsd:element name="properties">
       <xsd:complexType>
         <xsd:sequence>
@@ -7214,6 +7294,11 @@
                 <xsd:element ref="ns2:MediaServiceMetadata" minOccurs="0"/>
                 <xsd:element ref="ns2:MediaServiceFastMetadata" minOccurs="0"/>
                 <xsd:element ref="ns2:MediaServiceSearchProperties" minOccurs="0"/>
+                <xsd:element ref="ns2:MediaServiceDateTaken" minOccurs="0"/>
+                <xsd:element ref="ns2:lcf76f155ced4ddcb4097134ff3c332f" minOccurs="0"/>
+                <xsd:element ref="ns3:TaxCatchAll" minOccurs="0"/>
+                <xsd:element ref="ns2:MediaServiceGenerationTime" minOccurs="0"/>
+                <xsd:element ref="ns2:MediaServiceEventHashCode" minOccurs="0"/>
               </xsd:all>
             </xsd:complexType>
           </xsd:element>
@@ -7238,6 +7323,43 @@
       <xsd:simpleType>
         <xsd:restriction base="dms:Note"/>
       </xsd:simpleType>
+    </xsd:element>
+    <xsd:element name="MediaServiceDateTaken" ma:index="11" nillable="true" ma:displayName="MediaServiceDateTaken" ma:hidden="true" ma:indexed="true" ma:internalName="MediaServiceDateTaken" ma:readOnly="true">
+      <xsd:simpleType>
+        <xsd:restriction base="dms:Text"/>
+      </xsd:simpleType>
+    </xsd:element>
+    <xsd:element name="lcf76f155ced4ddcb4097134ff3c332f" ma:index="13" nillable="true" ma:taxonomy="true" ma:internalName="lcf76f155ced4ddcb4097134ff3c332f" ma:taxonomyFieldName="MediaServiceImageTags" ma:displayName="Značky obrázků" ma:readOnly="false" ma:fieldId="{5cf76f15-5ced-4ddc-b409-7134ff3c332f}" ma:taxonomyMulti="true" ma:sspId="ebb97977-59de-4a56-a93a-a55cc960f67b" ma:termSetId="09814cd3-568e-fe90-9814-8d621ff8fb84" ma:anchorId="fba54fb3-c3e1-fe81-a776-ca4b69148c4d" ma:open="true" ma:isKeyword="false">
+      <xsd:complexType>
+        <xsd:sequence>
+          <xsd:element ref="pc:Terms" minOccurs="0" maxOccurs="1"/>
+        </xsd:sequence>
+      </xsd:complexType>
+    </xsd:element>
+    <xsd:element name="MediaServiceGenerationTime" ma:index="15" nillable="true" ma:displayName="MediaServiceGenerationTime" ma:hidden="true" ma:internalName="MediaServiceGenerationTime" ma:readOnly="true">
+      <xsd:simpleType>
+        <xsd:restriction base="dms:Text"/>
+      </xsd:simpleType>
+    </xsd:element>
+    <xsd:element name="MediaServiceEventHashCode" ma:index="16" nillable="true" ma:displayName="MediaServiceEventHashCode" ma:hidden="true" ma:internalName="MediaServiceEventHashCode" ma:readOnly="true">
+      <xsd:simpleType>
+        <xsd:restriction base="dms:Text"/>
+      </xsd:simpleType>
+    </xsd:element>
+  </xsd:schema>
+  <xsd:schema xmlns:xsd="http://www.w3.org/2001/XMLSchema" xmlns:xs="http://www.w3.org/2001/XMLSchema" xmlns:dms="http://schemas.microsoft.com/office/2006/documentManagement/types" xmlns:pc="http://schemas.microsoft.com/office/infopath/2007/PartnerControls" targetNamespace="3eb61919-e7f8-4a11-8db4-9145fbd21da9" elementFormDefault="qualified">
+    <xsd:import namespace="http://schemas.microsoft.com/office/2006/documentManagement/types"/>
+    <xsd:import namespace="http://schemas.microsoft.com/office/infopath/2007/PartnerControls"/>
+    <xsd:element name="TaxCatchAll" ma:index="14" nillable="true" ma:displayName="Taxonomy Catch All Column" ma:hidden="true" ma:list="{b81dadd1-d650-44b3-88bb-a397f6058a88}" ma:internalName="TaxCatchAll" ma:showField="CatchAllData" ma:web="3eb61919-e7f8-4a11-8db4-9145fbd21da9">
+      <xsd:complexType>
+        <xsd:complexContent>
+          <xsd:extension base="dms:MultiChoiceLookup">
+            <xsd:sequence>
+              <xsd:element name="Value" type="dms:Lookup" maxOccurs="unbounded" minOccurs="0" nillable="true"/>
+            </xsd:sequence>
+          </xsd:extension>
+        </xsd:complexContent>
+      </xsd:complexType>
     </xsd:element>
   </xsd:schema>
   <xsd:schema xmlns="http://schemas.openxmlformats.org/package/2006/metadata/core-properties" xmlns:xsd="http://www.w3.org/2001/XMLSchema" xmlns:xsi="http://www.w3.org/2001/XMLSchema-instance" xmlns:dc="http://purl.org/dc/elements/1.1/" xmlns:dcterms="http://purl.org/dc/terms/" xmlns:odoc="http://schemas.microsoft.com/internal/obd" targetNamespace="http://schemas.openxmlformats.org/package/2006/metadata/core-properties" elementFormDefault="qualified" attributeFormDefault="unqualified" blockDefault="#all">
@@ -7339,35 +7461,18 @@
 </ct:contentTypeSchema>
 </file>
 
-<file path=customXml/item2.xml><?xml version="1.0" encoding="utf-8"?>
-<?mso-contentType ?>
-<FormTemplates xmlns="http://schemas.microsoft.com/sharepoint/v3/contenttype/forms">
-  <Display>DocumentLibraryForm</Display>
-  <Edit>DocumentLibraryForm</Edit>
-  <New>DocumentLibraryForm</New>
-</FormTemplates>
-</file>
-
-<file path=customXml/item3.xml><?xml version="1.0" encoding="utf-8"?>
-<p:properties xmlns:p="http://schemas.microsoft.com/office/2006/metadata/properties" xmlns:xsi="http://www.w3.org/2001/XMLSchema-instance" xmlns:pc="http://schemas.microsoft.com/office/infopath/2007/PartnerControls">
-  <documentManagement/>
-</p:properties>
-</file>
-
 <file path=customXml/itemProps1.xml><?xml version="1.0" encoding="utf-8"?>
-<ds:datastoreItem xmlns:ds="http://schemas.openxmlformats.org/officeDocument/2006/customXml" ds:itemID="{9674EAF8-DD41-465A-8B55-7A371017CB7A}">
+<ds:datastoreItem xmlns:ds="http://schemas.openxmlformats.org/officeDocument/2006/customXml" ds:itemID="{7CF52871-FF00-4D4A-8396-DA8C6A507140}">
   <ds:schemaRefs>
-    <ds:schemaRef ds:uri="http://schemas.microsoft.com/office/2006/metadata/contentType"/>
-    <ds:schemaRef ds:uri="http://schemas.microsoft.com/office/2006/metadata/properties/metaAttributes"/>
-    <ds:schemaRef ds:uri="http://www.w3.org/2001/XMLSchema"/>
+    <ds:schemaRef ds:uri="http://purl.org/dc/dcmitype/"/>
+    <ds:schemaRef ds:uri="http://schemas.microsoft.com/office/2006/documentManagement/types"/>
+    <ds:schemaRef ds:uri="http://schemas.openxmlformats.org/package/2006/metadata/core-properties"/>
     <ds:schemaRef ds:uri="http://schemas.microsoft.com/office/2006/metadata/properties"/>
     <ds:schemaRef ds:uri="09a37b55-a4d7-45bd-a73f-33c2b1d41898"/>
-    <ds:schemaRef ds:uri="http://schemas.microsoft.com/office/2006/documentManagement/types"/>
+    <ds:schemaRef ds:uri="http://purl.org/dc/terms/"/>
+    <ds:schemaRef ds:uri="http://purl.org/dc/elements/1.1/"/>
     <ds:schemaRef ds:uri="http://schemas.microsoft.com/office/infopath/2007/PartnerControls"/>
-    <ds:schemaRef ds:uri="http://schemas.openxmlformats.org/package/2006/metadata/core-properties"/>
-    <ds:schemaRef ds:uri="http://purl.org/dc/elements/1.1/"/>
-    <ds:schemaRef ds:uri="http://purl.org/dc/terms/"/>
-    <ds:schemaRef ds:uri="http://schemas.microsoft.com/internal/obd"/>
+    <ds:schemaRef ds:uri="http://www.w3.org/XML/1998/namespace"/>
   </ds:schemaRefs>
 </ds:datastoreItem>
 </file>
@@ -7381,17 +7486,5 @@
 </file>
 
 <file path=customXml/itemProps3.xml><?xml version="1.0" encoding="utf-8"?>
-<ds:datastoreItem xmlns:ds="http://schemas.openxmlformats.org/officeDocument/2006/customXml" ds:itemID="{7CF52871-FF00-4D4A-8396-DA8C6A507140}">
-  <ds:schemaRefs>
-    <ds:schemaRef ds:uri="http://purl.org/dc/dcmitype/"/>
-    <ds:schemaRef ds:uri="http://schemas.microsoft.com/office/2006/documentManagement/types"/>
-    <ds:schemaRef ds:uri="http://schemas.openxmlformats.org/package/2006/metadata/core-properties"/>
-    <ds:schemaRef ds:uri="http://schemas.microsoft.com/office/2006/metadata/properties"/>
-    <ds:schemaRef ds:uri="09a37b55-a4d7-45bd-a73f-33c2b1d41898"/>
-    <ds:schemaRef ds:uri="http://purl.org/dc/terms/"/>
-    <ds:schemaRef ds:uri="http://purl.org/dc/elements/1.1/"/>
-    <ds:schemaRef ds:uri="http://schemas.microsoft.com/office/infopath/2007/PartnerControls"/>
-    <ds:schemaRef ds:uri="http://www.w3.org/XML/1998/namespace"/>
-  </ds:schemaRefs>
-</ds:datastoreItem>
+<ds:datastoreItem xmlns:ds="http://schemas.openxmlformats.org/officeDocument/2006/customXml" ds:itemID="{5A53AAF3-5B8E-4E9B-8179-BBF9A29C371D}"/>
 </file>